--- a/topic10-declaring-types-and-classes/unit-10a-lectures/talk-1/a-type-decl.pptx
+++ b/topic10-declaring-types-and-classes/unit-10a-lectures/talk-1/a-type-decl.pptx
@@ -564,10 +564,10 @@
           </a:ln>
           <a:extLst>
             <a:ext uri="{FAA26D3D-D897-4be2-8F04-BA451C77F1D7}">
-              <ma14:placeholderFlag xmlns="" xmlns:ma14="http://schemas.microsoft.com/office/mac/drawingml/2011/main" val="1"/>
+              <ma14:placeholderFlag xmlns:ma14="http://schemas.microsoft.com/office/mac/drawingml/2011/main" xmlns="" val="1"/>
             </a:ext>
             <a:ext uri="{909E8E84-426E-40dd-AFC4-6F175D3DCCD1}">
-              <a14:hiddenFill xmlns="" xmlns:a14="http://schemas.microsoft.com/office/drawing/2010/main">
+              <a14:hiddenFill xmlns:a14="http://schemas.microsoft.com/office/drawing/2010/main" xmlns="">
                 <a:solidFill>
                   <a:srgbClr val="FFFFFF"/>
                 </a:solidFill>
@@ -905,14 +905,14 @@
           <a:noFill/>
           <a:extLst>
             <a:ext uri="{909E8E84-426E-40dd-AFC4-6F175D3DCCD1}">
-              <a14:hiddenFill xmlns="" xmlns:a14="http://schemas.microsoft.com/office/drawing/2010/main">
+              <a14:hiddenFill xmlns:a14="http://schemas.microsoft.com/office/drawing/2010/main" xmlns="">
                 <a:solidFill>
                   <a:srgbClr val="FFFFFF"/>
                 </a:solidFill>
               </a14:hiddenFill>
             </a:ext>
             <a:ext uri="{91240B29-F687-4f45-9708-019B960494DF}">
-              <a14:hiddenLine xmlns="" xmlns:a14="http://schemas.microsoft.com/office/drawing/2010/main" w="9525">
+              <a14:hiddenLine xmlns:a14="http://schemas.microsoft.com/office/drawing/2010/main" xmlns="" w="9525">
                 <a:solidFill>
                   <a:srgbClr val="000000"/>
                 </a:solidFill>
@@ -1468,7 +1468,7 @@
             <a:fld id="{08B9EBBA-996F-894A-B54A-D6246ED52CEA}" type="datetimeFigureOut">
               <a:rPr lang="en-US" smtClean="0"/>
               <a:pPr/>
-              <a:t>3/31/25</a:t>
+              <a:t>2/19/26</a:t>
             </a:fld>
             <a:endParaRPr lang="en-US" dirty="0"/>
           </a:p>
@@ -1890,7 +1890,7 @@
             <a:fld id="{09B482E8-6E0E-1B4F-B1FD-C69DB9E858D9}" type="datetimeFigureOut">
               <a:rPr lang="en-US" smtClean="0"/>
               <a:pPr/>
-              <a:t>3/31/25</a:t>
+              <a:t>2/19/26</a:t>
             </a:fld>
             <a:endParaRPr lang="en-US" dirty="0"/>
           </a:p>
@@ -2234,7 +2234,7 @@
             <a:fld id="{09B482E8-6E0E-1B4F-B1FD-C69DB9E858D9}" type="datetimeFigureOut">
               <a:rPr lang="en-US" smtClean="0"/>
               <a:pPr/>
-              <a:t>3/31/25</a:t>
+              <a:t>2/19/26</a:t>
             </a:fld>
             <a:endParaRPr lang="en-US" dirty="0"/>
           </a:p>
@@ -2647,7 +2647,7 @@
             <a:fld id="{09B482E8-6E0E-1B4F-B1FD-C69DB9E858D9}" type="datetimeFigureOut">
               <a:rPr lang="en-US" smtClean="0"/>
               <a:pPr/>
-              <a:t>3/31/25</a:t>
+              <a:t>2/19/26</a:t>
             </a:fld>
             <a:endParaRPr lang="en-US" dirty="0"/>
           </a:p>
@@ -3223,7 +3223,7 @@
             <a:fld id="{09B482E8-6E0E-1B4F-B1FD-C69DB9E858D9}" type="datetimeFigureOut">
               <a:rPr lang="en-US" smtClean="0"/>
               <a:pPr/>
-              <a:t>3/31/25</a:t>
+              <a:t>2/19/26</a:t>
             </a:fld>
             <a:endParaRPr lang="en-US" dirty="0"/>
           </a:p>
@@ -3912,7 +3912,7 @@
             <a:fld id="{09B482E8-6E0E-1B4F-B1FD-C69DB9E858D9}" type="datetimeFigureOut">
               <a:rPr lang="en-US" smtClean="0"/>
               <a:pPr/>
-              <a:t>3/31/25</a:t>
+              <a:t>2/19/26</a:t>
             </a:fld>
             <a:endParaRPr lang="en-US" dirty="0"/>
           </a:p>
@@ -4833,7 +4833,7 @@
             <a:fld id="{09B482E8-6E0E-1B4F-B1FD-C69DB9E858D9}" type="datetimeFigureOut">
               <a:rPr lang="en-US" smtClean="0"/>
               <a:pPr/>
-              <a:t>3/31/25</a:t>
+              <a:t>2/19/26</a:t>
             </a:fld>
             <a:endParaRPr lang="en-US" dirty="0"/>
           </a:p>
@@ -5154,7 +5154,7 @@
             <a:fld id="{09B482E8-6E0E-1B4F-B1FD-C69DB9E858D9}" type="datetimeFigureOut">
               <a:rPr lang="en-US" smtClean="0"/>
               <a:pPr/>
-              <a:t>3/31/25</a:t>
+              <a:t>2/19/26</a:t>
             </a:fld>
             <a:endParaRPr lang="en-US" dirty="0"/>
           </a:p>
@@ -5425,7 +5425,7 @@
             <a:fld id="{09B482E8-6E0E-1B4F-B1FD-C69DB9E858D9}" type="datetimeFigureOut">
               <a:rPr lang="en-US" smtClean="0"/>
               <a:pPr/>
-              <a:t>3/31/25</a:t>
+              <a:t>2/19/26</a:t>
             </a:fld>
             <a:endParaRPr lang="en-US" dirty="0"/>
           </a:p>
@@ -5623,6 +5623,13 @@
             <a:schemeClr val="lt1"/>
           </a:fontRef>
         </p:style>
+        <p:txBody>
+          <a:bodyPr/>
+          <a:lstStyle/>
+          <a:p>
+            <a:endParaRPr lang="en-US"/>
+          </a:p>
+        </p:txBody>
       </p:sp>
       <p:sp>
         <p:nvSpPr>
@@ -5661,6 +5668,13 @@
             <a:schemeClr val="lt1"/>
           </a:fontRef>
         </p:style>
+        <p:txBody>
+          <a:bodyPr/>
+          <a:lstStyle/>
+          <a:p>
+            <a:endParaRPr lang="en-US"/>
+          </a:p>
+        </p:txBody>
       </p:sp>
       <p:sp>
         <p:nvSpPr>
@@ -5755,7 +5769,7 @@
             <a:fld id="{09B482E8-6E0E-1B4F-B1FD-C69DB9E858D9}" type="datetimeFigureOut">
               <a:rPr lang="en-US" smtClean="0"/>
               <a:pPr/>
-              <a:t>3/31/25</a:t>
+              <a:t>2/19/26</a:t>
             </a:fld>
             <a:endParaRPr lang="en-US" dirty="0"/>
           </a:p>
@@ -6151,7 +6165,7 @@
             <a:fld id="{8DFA1846-DA80-1C48-A609-854EA85C59AD}" type="datetimeFigureOut">
               <a:rPr lang="en-US" smtClean="0"/>
               <a:pPr/>
-              <a:t>3/31/25</a:t>
+              <a:t>2/19/26</a:t>
             </a:fld>
             <a:endParaRPr lang="en-US" dirty="0"/>
           </a:p>
@@ -6534,7 +6548,7 @@
             <a:fld id="{09B482E8-6E0E-1B4F-B1FD-C69DB9E858D9}" type="datetimeFigureOut">
               <a:rPr lang="en-US" smtClean="0"/>
               <a:pPr/>
-              <a:t>3/31/25</a:t>
+              <a:t>2/19/26</a:t>
             </a:fld>
             <a:endParaRPr lang="en-US" dirty="0"/>
           </a:p>
@@ -7047,7 +7061,7 @@
             <a:fld id="{09B482E8-6E0E-1B4F-B1FD-C69DB9E858D9}" type="datetimeFigureOut">
               <a:rPr lang="en-US" smtClean="0"/>
               <a:pPr/>
-              <a:t>3/31/25</a:t>
+              <a:t>2/19/26</a:t>
             </a:fld>
             <a:endParaRPr lang="en-US" dirty="0"/>
           </a:p>
@@ -7231,6 +7245,13 @@
             <a:schemeClr val="lt1"/>
           </a:fontRef>
         </p:style>
+        <p:txBody>
+          <a:bodyPr/>
+          <a:lstStyle/>
+          <a:p>
+            <a:endParaRPr lang="en-US"/>
+          </a:p>
+        </p:txBody>
       </p:sp>
       <p:sp>
         <p:nvSpPr>
@@ -7269,6 +7290,13 @@
             <a:schemeClr val="lt1"/>
           </a:fontRef>
         </p:style>
+        <p:txBody>
+          <a:bodyPr/>
+          <a:lstStyle/>
+          <a:p>
+            <a:endParaRPr lang="en-US"/>
+          </a:p>
+        </p:txBody>
       </p:sp>
       <p:sp>
         <p:nvSpPr>
@@ -7311,7 +7339,7 @@
             <a:fld id="{F13A34C8-038E-2045-AF43-DF7DBB8E0E9E}" type="datetimeFigureOut">
               <a:rPr lang="en-US" smtClean="0"/>
               <a:pPr/>
-              <a:t>3/31/25</a:t>
+              <a:t>2/19/26</a:t>
             </a:fld>
             <a:endParaRPr lang="en-US" dirty="0"/>
           </a:p>
@@ -7462,6 +7490,13 @@
             <a:schemeClr val="lt1"/>
           </a:fontRef>
         </p:style>
+        <p:txBody>
+          <a:bodyPr/>
+          <a:lstStyle/>
+          <a:p>
+            <a:endParaRPr lang="en-US"/>
+          </a:p>
+        </p:txBody>
       </p:sp>
       <p:sp>
         <p:nvSpPr>
@@ -7481,7 +7516,7 @@
             <a:fld id="{8818C68F-D26B-8F47-958C-23B49CF8A634}" type="datetimeFigureOut">
               <a:rPr lang="en-US" smtClean="0"/>
               <a:pPr/>
-              <a:t>3/31/25</a:t>
+              <a:t>2/19/26</a:t>
             </a:fld>
             <a:endParaRPr lang="en-US" dirty="0"/>
           </a:p>
@@ -7878,7 +7913,7 @@
             <a:fld id="{09B482E8-6E0E-1B4F-B1FD-C69DB9E858D9}" type="datetimeFigureOut">
               <a:rPr lang="en-US" smtClean="0"/>
               <a:pPr/>
-              <a:t>3/31/25</a:t>
+              <a:t>2/19/26</a:t>
             </a:fld>
             <a:endParaRPr lang="en-US" dirty="0"/>
           </a:p>
@@ -8294,7 +8329,7 @@
             <a:fld id="{09B482E8-6E0E-1B4F-B1FD-C69DB9E858D9}" type="datetimeFigureOut">
               <a:rPr lang="en-US" smtClean="0"/>
               <a:pPr/>
-              <a:t>3/31/25</a:t>
+              <a:t>2/19/26</a:t>
             </a:fld>
             <a:endParaRPr lang="en-US" dirty="0"/>
           </a:p>
@@ -8545,7 +8580,7 @@
             <a:fld id="{09B482E8-6E0E-1B4F-B1FD-C69DB9E858D9}" type="datetimeFigureOut">
               <a:rPr lang="en-US" smtClean="0"/>
               <a:pPr/>
-              <a:t>3/31/25</a:t>
+              <a:t>2/19/26</a:t>
             </a:fld>
             <a:endParaRPr lang="en-US" dirty="0"/>
           </a:p>
@@ -8982,14 +9017,14 @@
           <a:noFill/>
           <a:extLst>
             <a:ext uri="{909E8E84-426E-40dd-AFC4-6F175D3DCCD1}">
-              <a14:hiddenFill xmlns="" xmlns:a14="http://schemas.microsoft.com/office/drawing/2010/main">
+              <a14:hiddenFill xmlns:a14="http://schemas.microsoft.com/office/drawing/2010/main" xmlns="">
                 <a:solidFill>
                   <a:srgbClr val="FFFFFF"/>
                 </a:solidFill>
               </a14:hiddenFill>
             </a:ext>
             <a:ext uri="{91240B29-F687-4f45-9708-019B960494DF}">
-              <a14:hiddenLine xmlns="" xmlns:a14="http://schemas.microsoft.com/office/drawing/2010/main" w="9525">
+              <a14:hiddenLine xmlns:a14="http://schemas.microsoft.com/office/drawing/2010/main" xmlns="" w="9525">
                 <a:solidFill>
                   <a:srgbClr val="000000"/>
                 </a:solidFill>
@@ -9197,8 +9232,41 @@
               <a:rPr kumimoji="1" lang="en-US" sz="3200" dirty="0">
                 <a:cs typeface="+mn-cs"/>
               </a:rPr>
-              <a:t>Chapter 10.1 - Declaring Types</a:t>
-            </a:r>
+              <a:t>Chapter 10.1 - Declaring Types </a:t>
+            </a:r>
+            <a:r>
+              <a:rPr kumimoji="1" lang="en-US" sz="3200" dirty="0" err="1">
+                <a:solidFill>
+                  <a:srgbClr val="FF0000"/>
+                </a:solidFill>
+                <a:cs typeface="+mn-cs"/>
+              </a:rPr>
+              <a:t>todo</a:t>
+            </a:r>
+            <a:r>
+              <a:rPr kumimoji="1" lang="en-US" sz="3200" dirty="0">
+                <a:solidFill>
+                  <a:srgbClr val="FF0000"/>
+                </a:solidFill>
+                <a:cs typeface="+mn-cs"/>
+              </a:rPr>
+              <a:t> – add </a:t>
+            </a:r>
+            <a:r>
+              <a:rPr kumimoji="1" lang="en-US" sz="3200" dirty="0" err="1">
+                <a:solidFill>
+                  <a:srgbClr val="FF0000"/>
+                </a:solidFill>
+                <a:cs typeface="+mn-cs"/>
+              </a:rPr>
+              <a:t>newtypes</a:t>
+            </a:r>
+            <a:endParaRPr kumimoji="1" lang="en-US" sz="3200" dirty="0">
+              <a:solidFill>
+                <a:srgbClr val="FF0000"/>
+              </a:solidFill>
+              <a:cs typeface="+mn-cs"/>
+            </a:endParaRPr>
           </a:p>
         </p:txBody>
       </p:sp>
@@ -9237,14 +9305,14 @@
           </a:ln>
           <a:extLst>
             <a:ext uri="{909E8E84-426E-40dd-AFC4-6F175D3DCCD1}">
-              <a14:hiddenFill xmlns="" xmlns:a14="http://schemas.microsoft.com/office/drawing/2010/main">
+              <a14:hiddenFill xmlns:a14="http://schemas.microsoft.com/office/drawing/2010/main" xmlns="">
                 <a:solidFill>
                   <a:srgbClr val="FFFFFF"/>
                 </a:solidFill>
               </a14:hiddenFill>
             </a:ext>
             <a:ext uri="{91240B29-F687-4f45-9708-019B960494DF}">
-              <a14:hiddenLine xmlns="" xmlns:a14="http://schemas.microsoft.com/office/drawing/2010/main" w="9525">
+              <a14:hiddenLine xmlns:a14="http://schemas.microsoft.com/office/drawing/2010/main" xmlns="" w="9525">
                 <a:solidFill>
                   <a:srgbClr val="000000"/>
                 </a:solidFill>
@@ -9295,14 +9363,14 @@
           <a:noFill/>
           <a:extLst>
             <a:ext uri="{909E8E84-426E-40dd-AFC4-6F175D3DCCD1}">
-              <a14:hiddenFill xmlns="" xmlns:a14="http://schemas.microsoft.com/office/drawing/2010/main">
+              <a14:hiddenFill xmlns:a14="http://schemas.microsoft.com/office/drawing/2010/main" xmlns="">
                 <a:solidFill>
                   <a:srgbClr val="FFFFFF"/>
                 </a:solidFill>
               </a14:hiddenFill>
             </a:ext>
             <a:ext uri="{91240B29-F687-4f45-9708-019B960494DF}">
-              <a14:hiddenLine xmlns="" xmlns:a14="http://schemas.microsoft.com/office/drawing/2010/main" w="9525">
+              <a14:hiddenLine xmlns:a14="http://schemas.microsoft.com/office/drawing/2010/main" xmlns="" w="9525">
                 <a:solidFill>
                   <a:srgbClr val="000000"/>
                 </a:solidFill>
@@ -9495,14 +9563,14 @@
           </a:ln>
           <a:extLst>
             <a:ext uri="{909E8E84-426E-40dd-AFC4-6F175D3DCCD1}">
-              <a14:hiddenFill xmlns="" xmlns:a14="http://schemas.microsoft.com/office/drawing/2010/main">
+              <a14:hiddenFill xmlns:a14="http://schemas.microsoft.com/office/drawing/2010/main" xmlns="">
                 <a:solidFill>
                   <a:srgbClr val="FFFFFF"/>
                 </a:solidFill>
               </a14:hiddenFill>
             </a:ext>
             <a:ext uri="{91240B29-F687-4f45-9708-019B960494DF}">
-              <a14:hiddenLine xmlns="" xmlns:a14="http://schemas.microsoft.com/office/drawing/2010/main" w="9525">
+              <a14:hiddenLine xmlns:a14="http://schemas.microsoft.com/office/drawing/2010/main" xmlns="" w="9525">
                 <a:solidFill>
                   <a:srgbClr val="000000"/>
                 </a:solidFill>
@@ -10098,14 +10166,14 @@
           <a:noFill/>
           <a:extLst>
             <a:ext uri="{909E8E84-426E-40dd-AFC4-6F175D3DCCD1}">
-              <a14:hiddenFill xmlns="" xmlns:a14="http://schemas.microsoft.com/office/drawing/2010/main">
+              <a14:hiddenFill xmlns:a14="http://schemas.microsoft.com/office/drawing/2010/main" xmlns="">
                 <a:solidFill>
                   <a:srgbClr val="FFFFFF"/>
                 </a:solidFill>
               </a14:hiddenFill>
             </a:ext>
             <a:ext uri="{91240B29-F687-4f45-9708-019B960494DF}">
-              <a14:hiddenLine xmlns="" xmlns:a14="http://schemas.microsoft.com/office/drawing/2010/main" w="9525">
+              <a14:hiddenLine xmlns:a14="http://schemas.microsoft.com/office/drawing/2010/main" xmlns="" w="9525">
                 <a:solidFill>
                   <a:srgbClr val="000000"/>
                 </a:solidFill>
@@ -11074,14 +11142,14 @@
           <a:noFill/>
           <a:extLst>
             <a:ext uri="{909E8E84-426E-40dd-AFC4-6F175D3DCCD1}">
-              <a14:hiddenFill xmlns:a14="http://schemas.microsoft.com/office/drawing/2010/main" xmlns="">
+              <a14:hiddenFill xmlns="" xmlns:a14="http://schemas.microsoft.com/office/drawing/2010/main">
                 <a:solidFill>
                   <a:srgbClr val="FFFFFF"/>
                 </a:solidFill>
               </a14:hiddenFill>
             </a:ext>
             <a:ext uri="{91240B29-F687-4f45-9708-019B960494DF}">
-              <a14:hiddenLine xmlns:a14="http://schemas.microsoft.com/office/drawing/2010/main" xmlns="" w="9525">
+              <a14:hiddenLine xmlns="" xmlns:a14="http://schemas.microsoft.com/office/drawing/2010/main" w="9525">
                 <a:solidFill>
                   <a:srgbClr val="000000"/>
                 </a:solidFill>
@@ -11337,14 +11405,14 @@
           <a:effectLst/>
           <a:extLst>
             <a:ext uri="{909E8E84-426E-40dd-AFC4-6F175D3DCCD1}">
-              <a14:hiddenFill xmlns:a14="http://schemas.microsoft.com/office/drawing/2010/main" xmlns="">
+              <a14:hiddenFill xmlns="" xmlns:a14="http://schemas.microsoft.com/office/drawing/2010/main">
                 <a:solidFill>
                   <a:schemeClr val="accent1"/>
                 </a:solidFill>
               </a14:hiddenFill>
             </a:ext>
             <a:ext uri="{AF507438-7753-43e0-B8FC-AC1667EBCBE1}">
-              <a14:hiddenEffects xmlns:a14="http://schemas.microsoft.com/office/drawing/2010/main" xmlns="">
+              <a14:hiddenEffects xmlns="" xmlns:a14="http://schemas.microsoft.com/office/drawing/2010/main">
                 <a:effectLst>
                   <a:outerShdw blurRad="63500" dist="35921" dir="2700000" algn="ctr" rotWithShape="0">
                     <a:schemeClr val="bg2"/>
@@ -11408,14 +11476,14 @@
           <a:effectLst/>
           <a:extLst>
             <a:ext uri="{909E8E84-426E-40dd-AFC4-6F175D3DCCD1}">
-              <a14:hiddenFill xmlns:a14="http://schemas.microsoft.com/office/drawing/2010/main" xmlns="">
+              <a14:hiddenFill xmlns="" xmlns:a14="http://schemas.microsoft.com/office/drawing/2010/main">
                 <a:solidFill>
                   <a:schemeClr val="accent1"/>
                 </a:solidFill>
               </a14:hiddenFill>
             </a:ext>
             <a:ext uri="{AF507438-7753-43e0-B8FC-AC1667EBCBE1}">
-              <a14:hiddenEffects xmlns:a14="http://schemas.microsoft.com/office/drawing/2010/main" xmlns="">
+              <a14:hiddenEffects xmlns="" xmlns:a14="http://schemas.microsoft.com/office/drawing/2010/main">
                 <a:effectLst>
                   <a:outerShdw blurRad="63500" dist="35921" dir="2700000" algn="ctr" rotWithShape="0">
                     <a:schemeClr val="bg2"/>
@@ -12226,6 +12294,218 @@
       </p:sp>
       <p:sp>
         <p:nvSpPr>
+          <p:cNvPr id="8" name="TextBox 7">
+            <a:extLst>
+              <a:ext uri="{FF2B5EF4-FFF2-40B4-BE49-F238E27FC236}">
+                <a16:creationId xmlns:a16="http://schemas.microsoft.com/office/drawing/2014/main" id="{A8BF3CE4-C928-7942-85BB-362ADBEB314F}"/>
+              </a:ext>
+            </a:extLst>
+          </p:cNvPr>
+          <p:cNvSpPr txBox="1"/>
+          <p:nvPr/>
+        </p:nvSpPr>
+        <p:spPr>
+          <a:xfrm>
+            <a:off x="1383403" y="6083533"/>
+            <a:ext cx="9081332" cy="523220"/>
+          </a:xfrm>
+          <a:prstGeom prst="rect">
+            <a:avLst/>
+          </a:prstGeom>
+          <a:noFill/>
+        </p:spPr>
+        <p:txBody>
+          <a:bodyPr wrap="none" rtlCol="0">
+            <a:spAutoFit/>
+          </a:bodyPr>
+          <a:lstStyle/>
+          <a:p>
+            <a:r>
+              <a:rPr lang="en-US" sz="2800" dirty="0"/>
+              <a:t>Either is increasingly being used  in production Haskell </a:t>
+            </a:r>
+          </a:p>
+        </p:txBody>
+      </p:sp>
+      <p:sp>
+        <p:nvSpPr>
+          <p:cNvPr id="9" name="Rectangular Callout 8">
+            <a:extLst>
+              <a:ext uri="{FF2B5EF4-FFF2-40B4-BE49-F238E27FC236}">
+                <a16:creationId xmlns:a16="http://schemas.microsoft.com/office/drawing/2014/main" id="{2D473A88-D893-3C59-701B-CB34B33B777D}"/>
+              </a:ext>
+            </a:extLst>
+          </p:cNvPr>
+          <p:cNvSpPr/>
+          <p:nvPr/>
+        </p:nvSpPr>
+        <p:spPr bwMode="auto">
+          <a:xfrm>
+            <a:off x="-20836" y="3952512"/>
+            <a:ext cx="1907823" cy="1200329"/>
+          </a:xfrm>
+          <a:prstGeom prst="wedgeRectCallout">
+            <a:avLst>
+              <a:gd name="adj1" fmla="val 242333"/>
+              <a:gd name="adj2" fmla="val -167772"/>
+            </a:avLst>
+          </a:prstGeom>
+          <a:solidFill>
+            <a:srgbClr val="FFC000"/>
+          </a:solidFill>
+          <a:ln w="12700" cap="sq" cmpd="sng" algn="ctr">
+            <a:solidFill>
+              <a:schemeClr val="tx1"/>
+            </a:solidFill>
+            <a:prstDash val="solid"/>
+            <a:round/>
+            <a:headEnd type="none" w="med" len="med"/>
+            <a:tailEnd type="none" w="med" len="med"/>
+          </a:ln>
+          <a:effectLst/>
+          <a:extLst>
+            <a:ext uri="{909E8E84-426E-40dd-AFC4-6F175D3DCCD1}">
+              <a14:hiddenFill xmlns="" xmlns:a14="http://schemas.microsoft.com/office/drawing/2010/main">
+                <a:solidFill>
+                  <a:schemeClr val="accent1"/>
+                </a:solidFill>
+              </a14:hiddenFill>
+            </a:ext>
+            <a:ext uri="{AF507438-7753-43e0-B8FC-AC1667EBCBE1}">
+              <a14:hiddenEffects xmlns="" xmlns:a14="http://schemas.microsoft.com/office/drawing/2010/main">
+                <a:effectLst>
+                  <a:outerShdw blurRad="63500" dist="35921" dir="2700000" algn="ctr" rotWithShape="0">
+                    <a:schemeClr val="bg2"/>
+                  </a:outerShdw>
+                </a:effectLst>
+              </a14:hiddenEffects>
+            </a:ext>
+          </a:extLst>
+        </p:spPr>
+        <p:txBody>
+          <a:bodyPr vert="horz" wrap="square" lIns="91440" tIns="45720" rIns="91440" bIns="45720" numCol="1" rtlCol="0" anchor="ctr" anchorCtr="0" compatLnSpc="1">
+            <a:prstTxWarp prst="textNoShape">
+              <a:avLst/>
+            </a:prstTxWarp>
+            <a:spAutoFit/>
+          </a:bodyPr>
+          <a:lstStyle/>
+          <a:p>
+            <a:r>
+              <a:rPr lang="en-US" sz="2400" dirty="0"/>
+              <a:t>Indicates an error and returns an a</a:t>
+            </a:r>
+          </a:p>
+        </p:txBody>
+      </p:sp>
+      <p:sp>
+        <p:nvSpPr>
+          <p:cNvPr id="10" name="Rectangular Callout 9">
+            <a:extLst>
+              <a:ext uri="{FF2B5EF4-FFF2-40B4-BE49-F238E27FC236}">
+                <a16:creationId xmlns:a16="http://schemas.microsoft.com/office/drawing/2014/main" id="{E07B902F-8A02-72B6-CAF8-4A602C1C4937}"/>
+              </a:ext>
+            </a:extLst>
+          </p:cNvPr>
+          <p:cNvSpPr/>
+          <p:nvPr/>
+        </p:nvSpPr>
+        <p:spPr bwMode="auto">
+          <a:xfrm>
+            <a:off x="8832279" y="2690629"/>
+            <a:ext cx="3437467" cy="1200329"/>
+          </a:xfrm>
+          <a:prstGeom prst="wedgeRectCallout">
+            <a:avLst>
+              <a:gd name="adj1" fmla="val -87708"/>
+              <a:gd name="adj2" fmla="val -70731"/>
+            </a:avLst>
+          </a:prstGeom>
+          <a:solidFill>
+            <a:srgbClr val="FFC000"/>
+          </a:solidFill>
+          <a:ln w="12700" cap="sq" cmpd="sng" algn="ctr">
+            <a:solidFill>
+              <a:schemeClr val="tx1"/>
+            </a:solidFill>
+            <a:prstDash val="solid"/>
+            <a:round/>
+            <a:headEnd type="none" w="med" len="med"/>
+            <a:tailEnd type="none" w="med" len="med"/>
+          </a:ln>
+          <a:effectLst/>
+          <a:extLst>
+            <a:ext uri="{909E8E84-426E-40dd-AFC4-6F175D3DCCD1}">
+              <a14:hiddenFill xmlns="" xmlns:a14="http://schemas.microsoft.com/office/drawing/2010/main">
+                <a:solidFill>
+                  <a:schemeClr val="accent1"/>
+                </a:solidFill>
+              </a14:hiddenFill>
+            </a:ext>
+            <a:ext uri="{AF507438-7753-43e0-B8FC-AC1667EBCBE1}">
+              <a14:hiddenEffects xmlns="" xmlns:a14="http://schemas.microsoft.com/office/drawing/2010/main">
+                <a:effectLst>
+                  <a:outerShdw blurRad="63500" dist="35921" dir="2700000" algn="ctr" rotWithShape="0">
+                    <a:schemeClr val="bg2"/>
+                  </a:outerShdw>
+                </a:effectLst>
+              </a14:hiddenEffects>
+            </a:ext>
+          </a:extLst>
+        </p:spPr>
+        <p:txBody>
+          <a:bodyPr vert="horz" wrap="square" lIns="91440" tIns="45720" rIns="91440" bIns="45720" numCol="1" rtlCol="0" anchor="ctr" anchorCtr="0" compatLnSpc="1">
+            <a:prstTxWarp prst="textNoShape">
+              <a:avLst/>
+            </a:prstTxWarp>
+            <a:spAutoFit/>
+          </a:bodyPr>
+          <a:lstStyle/>
+          <a:p>
+            <a:r>
+              <a:rPr lang="en-US" sz="2400" dirty="0"/>
+              <a:t>b is the type of the answer when no error is thrown</a:t>
+            </a:r>
+          </a:p>
+        </p:txBody>
+      </p:sp>
+      <p:sp>
+        <p:nvSpPr>
+          <p:cNvPr id="5" name="TextBox 4">
+            <a:extLst>
+              <a:ext uri="{FF2B5EF4-FFF2-40B4-BE49-F238E27FC236}">
+                <a16:creationId xmlns:a16="http://schemas.microsoft.com/office/drawing/2014/main" id="{954CF8C1-1AA3-A147-97D3-B2D3634FF70E}"/>
+              </a:ext>
+            </a:extLst>
+          </p:cNvPr>
+          <p:cNvSpPr txBox="1"/>
+          <p:nvPr/>
+        </p:nvSpPr>
+        <p:spPr>
+          <a:xfrm>
+            <a:off x="1383403" y="2905780"/>
+            <a:ext cx="7224606" cy="523220"/>
+          </a:xfrm>
+          <a:prstGeom prst="rect">
+            <a:avLst/>
+          </a:prstGeom>
+          <a:noFill/>
+        </p:spPr>
+        <p:txBody>
+          <a:bodyPr wrap="none" rtlCol="0">
+            <a:spAutoFit/>
+          </a:bodyPr>
+          <a:lstStyle/>
+          <a:p>
+            <a:r>
+              <a:rPr lang="en-US" sz="2800" dirty="0"/>
+              <a:t>We can similarly use Either to handle errors</a:t>
+            </a:r>
+          </a:p>
+        </p:txBody>
+      </p:sp>
+      <p:sp>
+        <p:nvSpPr>
           <p:cNvPr id="7" name="Text Box 8">
             <a:extLst>
               <a:ext uri="{FF2B5EF4-FFF2-40B4-BE49-F238E27FC236}">
@@ -12293,218 +12573,6 @@
                 <a:cs typeface="+mn-cs"/>
               </a:rPr>
               <a:t>               else Right (n `div` m)</a:t>
-            </a:r>
-          </a:p>
-        </p:txBody>
-      </p:sp>
-      <p:sp>
-        <p:nvSpPr>
-          <p:cNvPr id="8" name="TextBox 7">
-            <a:extLst>
-              <a:ext uri="{FF2B5EF4-FFF2-40B4-BE49-F238E27FC236}">
-                <a16:creationId xmlns:a16="http://schemas.microsoft.com/office/drawing/2014/main" id="{A8BF3CE4-C928-7942-85BB-362ADBEB314F}"/>
-              </a:ext>
-            </a:extLst>
-          </p:cNvPr>
-          <p:cNvSpPr txBox="1"/>
-          <p:nvPr/>
-        </p:nvSpPr>
-        <p:spPr>
-          <a:xfrm>
-            <a:off x="1383403" y="6083533"/>
-            <a:ext cx="9081332" cy="523220"/>
-          </a:xfrm>
-          <a:prstGeom prst="rect">
-            <a:avLst/>
-          </a:prstGeom>
-          <a:noFill/>
-        </p:spPr>
-        <p:txBody>
-          <a:bodyPr wrap="none" rtlCol="0">
-            <a:spAutoFit/>
-          </a:bodyPr>
-          <a:lstStyle/>
-          <a:p>
-            <a:r>
-              <a:rPr lang="en-US" sz="2800" dirty="0"/>
-              <a:t>Either is increasingly being used  in production Haskell </a:t>
-            </a:r>
-          </a:p>
-        </p:txBody>
-      </p:sp>
-      <p:sp>
-        <p:nvSpPr>
-          <p:cNvPr id="9" name="Rectangular Callout 8">
-            <a:extLst>
-              <a:ext uri="{FF2B5EF4-FFF2-40B4-BE49-F238E27FC236}">
-                <a16:creationId xmlns:a16="http://schemas.microsoft.com/office/drawing/2014/main" id="{2D473A88-D893-3C59-701B-CB34B33B777D}"/>
-              </a:ext>
-            </a:extLst>
-          </p:cNvPr>
-          <p:cNvSpPr/>
-          <p:nvPr/>
-        </p:nvSpPr>
-        <p:spPr bwMode="auto">
-          <a:xfrm>
-            <a:off x="0" y="3237266"/>
-            <a:ext cx="1907823" cy="1200329"/>
-          </a:xfrm>
-          <a:prstGeom prst="wedgeRectCallout">
-            <a:avLst>
-              <a:gd name="adj1" fmla="val 242333"/>
-              <a:gd name="adj2" fmla="val -167772"/>
-            </a:avLst>
-          </a:prstGeom>
-          <a:solidFill>
-            <a:srgbClr val="FFC000"/>
-          </a:solidFill>
-          <a:ln w="12700" cap="sq" cmpd="sng" algn="ctr">
-            <a:solidFill>
-              <a:schemeClr val="tx1"/>
-            </a:solidFill>
-            <a:prstDash val="solid"/>
-            <a:round/>
-            <a:headEnd type="none" w="med" len="med"/>
-            <a:tailEnd type="none" w="med" len="med"/>
-          </a:ln>
-          <a:effectLst/>
-          <a:extLst>
-            <a:ext uri="{909E8E84-426E-40dd-AFC4-6F175D3DCCD1}">
-              <a14:hiddenFill xmlns:a14="http://schemas.microsoft.com/office/drawing/2010/main" xmlns="">
-                <a:solidFill>
-                  <a:schemeClr val="accent1"/>
-                </a:solidFill>
-              </a14:hiddenFill>
-            </a:ext>
-            <a:ext uri="{AF507438-7753-43e0-B8FC-AC1667EBCBE1}">
-              <a14:hiddenEffects xmlns:a14="http://schemas.microsoft.com/office/drawing/2010/main" xmlns="">
-                <a:effectLst>
-                  <a:outerShdw blurRad="63500" dist="35921" dir="2700000" algn="ctr" rotWithShape="0">
-                    <a:schemeClr val="bg2"/>
-                  </a:outerShdw>
-                </a:effectLst>
-              </a14:hiddenEffects>
-            </a:ext>
-          </a:extLst>
-        </p:spPr>
-        <p:txBody>
-          <a:bodyPr vert="horz" wrap="square" lIns="91440" tIns="45720" rIns="91440" bIns="45720" numCol="1" rtlCol="0" anchor="ctr" anchorCtr="0" compatLnSpc="1">
-            <a:prstTxWarp prst="textNoShape">
-              <a:avLst/>
-            </a:prstTxWarp>
-            <a:spAutoFit/>
-          </a:bodyPr>
-          <a:lstStyle/>
-          <a:p>
-            <a:r>
-              <a:rPr lang="en-US" sz="2400" dirty="0"/>
-              <a:t>Indicates an error and returns an a</a:t>
-            </a:r>
-          </a:p>
-        </p:txBody>
-      </p:sp>
-      <p:sp>
-        <p:nvSpPr>
-          <p:cNvPr id="10" name="Rectangular Callout 9">
-            <a:extLst>
-              <a:ext uri="{FF2B5EF4-FFF2-40B4-BE49-F238E27FC236}">
-                <a16:creationId xmlns:a16="http://schemas.microsoft.com/office/drawing/2014/main" id="{E07B902F-8A02-72B6-CAF8-4A602C1C4937}"/>
-              </a:ext>
-            </a:extLst>
-          </p:cNvPr>
-          <p:cNvSpPr/>
-          <p:nvPr/>
-        </p:nvSpPr>
-        <p:spPr bwMode="auto">
-          <a:xfrm>
-            <a:off x="8822268" y="2856226"/>
-            <a:ext cx="3437467" cy="1200329"/>
-          </a:xfrm>
-          <a:prstGeom prst="wedgeRectCallout">
-            <a:avLst>
-              <a:gd name="adj1" fmla="val -87708"/>
-              <a:gd name="adj2" fmla="val -70731"/>
-            </a:avLst>
-          </a:prstGeom>
-          <a:solidFill>
-            <a:srgbClr val="FFC000"/>
-          </a:solidFill>
-          <a:ln w="12700" cap="sq" cmpd="sng" algn="ctr">
-            <a:solidFill>
-              <a:schemeClr val="tx1"/>
-            </a:solidFill>
-            <a:prstDash val="solid"/>
-            <a:round/>
-            <a:headEnd type="none" w="med" len="med"/>
-            <a:tailEnd type="none" w="med" len="med"/>
-          </a:ln>
-          <a:effectLst/>
-          <a:extLst>
-            <a:ext uri="{909E8E84-426E-40dd-AFC4-6F175D3DCCD1}">
-              <a14:hiddenFill xmlns:a14="http://schemas.microsoft.com/office/drawing/2010/main" xmlns="">
-                <a:solidFill>
-                  <a:schemeClr val="accent1"/>
-                </a:solidFill>
-              </a14:hiddenFill>
-            </a:ext>
-            <a:ext uri="{AF507438-7753-43e0-B8FC-AC1667EBCBE1}">
-              <a14:hiddenEffects xmlns:a14="http://schemas.microsoft.com/office/drawing/2010/main" xmlns="">
-                <a:effectLst>
-                  <a:outerShdw blurRad="63500" dist="35921" dir="2700000" algn="ctr" rotWithShape="0">
-                    <a:schemeClr val="bg2"/>
-                  </a:outerShdw>
-                </a:effectLst>
-              </a14:hiddenEffects>
-            </a:ext>
-          </a:extLst>
-        </p:spPr>
-        <p:txBody>
-          <a:bodyPr vert="horz" wrap="square" lIns="91440" tIns="45720" rIns="91440" bIns="45720" numCol="1" rtlCol="0" anchor="ctr" anchorCtr="0" compatLnSpc="1">
-            <a:prstTxWarp prst="textNoShape">
-              <a:avLst/>
-            </a:prstTxWarp>
-            <a:spAutoFit/>
-          </a:bodyPr>
-          <a:lstStyle/>
-          <a:p>
-            <a:r>
-              <a:rPr lang="en-US" sz="2400" dirty="0"/>
-              <a:t>b is the type of the answer when no error is thrown</a:t>
-            </a:r>
-          </a:p>
-        </p:txBody>
-      </p:sp>
-      <p:sp>
-        <p:nvSpPr>
-          <p:cNvPr id="5" name="TextBox 4">
-            <a:extLst>
-              <a:ext uri="{FF2B5EF4-FFF2-40B4-BE49-F238E27FC236}">
-                <a16:creationId xmlns:a16="http://schemas.microsoft.com/office/drawing/2014/main" id="{954CF8C1-1AA3-A147-97D3-B2D3634FF70E}"/>
-              </a:ext>
-            </a:extLst>
-          </p:cNvPr>
-          <p:cNvSpPr txBox="1"/>
-          <p:nvPr/>
-        </p:nvSpPr>
-        <p:spPr>
-          <a:xfrm>
-            <a:off x="1383403" y="2905780"/>
-            <a:ext cx="7224606" cy="523220"/>
-          </a:xfrm>
-          <a:prstGeom prst="rect">
-            <a:avLst/>
-          </a:prstGeom>
-          <a:noFill/>
-        </p:spPr>
-        <p:txBody>
-          <a:bodyPr wrap="none" rtlCol="0">
-            <a:spAutoFit/>
-          </a:bodyPr>
-          <a:lstStyle/>
-          <a:p>
-            <a:r>
-              <a:rPr lang="en-US" sz="2800" dirty="0"/>
-              <a:t>We can similarly use Either to handle errors</a:t>
             </a:r>
           </a:p>
         </p:txBody>
@@ -13096,11 +13164,11 @@
     </p:tnLst>
     <p:bldLst>
       <p:bldP spid="3" grpId="0" animBg="1"/>
-      <p:bldP spid="7" grpId="1" animBg="1"/>
       <p:bldP spid="8" grpId="0"/>
       <p:bldP spid="9" grpId="0" animBg="1"/>
       <p:bldP spid="10" grpId="0" animBg="1"/>
       <p:bldP spid="5" grpId="0"/>
+      <p:bldP spid="7" grpId="1" animBg="1"/>
     </p:bldLst>
   </p:timing>
 </p:sld>
@@ -14256,14 +14324,14 @@
           <a:noFill/>
           <a:extLst>
             <a:ext uri="{909E8E84-426E-40dd-AFC4-6F175D3DCCD1}">
-              <a14:hiddenFill xmlns="" xmlns:a14="http://schemas.microsoft.com/office/drawing/2010/main">
+              <a14:hiddenFill xmlns:a14="http://schemas.microsoft.com/office/drawing/2010/main" xmlns="">
                 <a:solidFill>
                   <a:srgbClr val="FFFFFF"/>
                 </a:solidFill>
               </a14:hiddenFill>
             </a:ext>
             <a:ext uri="{91240B29-F687-4f45-9708-019B960494DF}">
-              <a14:hiddenLine xmlns="" xmlns:a14="http://schemas.microsoft.com/office/drawing/2010/main" w="9525">
+              <a14:hiddenLine xmlns:a14="http://schemas.microsoft.com/office/drawing/2010/main" xmlns="" w="9525">
                 <a:solidFill>
                   <a:srgbClr val="000000"/>
                 </a:solidFill>
@@ -14837,14 +14905,14 @@
           <a:noFill/>
           <a:extLst>
             <a:ext uri="{909E8E84-426E-40dd-AFC4-6F175D3DCCD1}">
-              <a14:hiddenFill xmlns="" xmlns:a14="http://schemas.microsoft.com/office/drawing/2010/main">
+              <a14:hiddenFill xmlns:a14="http://schemas.microsoft.com/office/drawing/2010/main" xmlns="">
                 <a:solidFill>
                   <a:srgbClr val="FFFFFF"/>
                 </a:solidFill>
               </a14:hiddenFill>
             </a:ext>
             <a:ext uri="{91240B29-F687-4f45-9708-019B960494DF}">
-              <a14:hiddenLine xmlns="" xmlns:a14="http://schemas.microsoft.com/office/drawing/2010/main" w="9525">
+              <a14:hiddenLine xmlns:a14="http://schemas.microsoft.com/office/drawing/2010/main" xmlns="" w="9525">
                 <a:solidFill>
                   <a:srgbClr val="000000"/>
                 </a:solidFill>
@@ -15037,14 +15105,14 @@
           </a:ln>
           <a:extLst>
             <a:ext uri="{909E8E84-426E-40dd-AFC4-6F175D3DCCD1}">
-              <a14:hiddenFill xmlns="" xmlns:a14="http://schemas.microsoft.com/office/drawing/2010/main">
+              <a14:hiddenFill xmlns:a14="http://schemas.microsoft.com/office/drawing/2010/main" xmlns="">
                 <a:solidFill>
                   <a:srgbClr val="FFFFFF"/>
                 </a:solidFill>
               </a14:hiddenFill>
             </a:ext>
             <a:ext uri="{91240B29-F687-4f45-9708-019B960494DF}">
-              <a14:hiddenLine xmlns="" xmlns:a14="http://schemas.microsoft.com/office/drawing/2010/main" w="9525">
+              <a14:hiddenLine xmlns:a14="http://schemas.microsoft.com/office/drawing/2010/main" xmlns="" w="9525">
                 <a:solidFill>
                   <a:srgbClr val="000000"/>
                 </a:solidFill>
@@ -15267,14 +15335,14 @@
             </a:ln>
             <a:extLst>
               <a:ext uri="{909E8E84-426E-40dd-AFC4-6F175D3DCCD1}">
-                <a14:hiddenFill xmlns="" xmlns:a14="http://schemas.microsoft.com/office/drawing/2010/main">
+                <a14:hiddenFill xmlns:a14="http://schemas.microsoft.com/office/drawing/2010/main" xmlns="">
                   <a:solidFill>
                     <a:srgbClr val="FFFFFF"/>
                   </a:solidFill>
                 </a14:hiddenFill>
               </a:ext>
               <a:ext uri="{91240B29-F687-4f45-9708-019B960494DF}">
-                <a14:hiddenLine xmlns="" xmlns:a14="http://schemas.microsoft.com/office/drawing/2010/main" w="9525">
+                <a14:hiddenLine xmlns:a14="http://schemas.microsoft.com/office/drawing/2010/main" xmlns="" w="9525">
                   <a:solidFill>
                     <a:srgbClr val="000000"/>
                   </a:solidFill>
@@ -15431,14 +15499,14 @@
             </a:ln>
             <a:extLst>
               <a:ext uri="{909E8E84-426E-40dd-AFC4-6F175D3DCCD1}">
-                <a14:hiddenFill xmlns="" xmlns:a14="http://schemas.microsoft.com/office/drawing/2010/main">
+                <a14:hiddenFill xmlns:a14="http://schemas.microsoft.com/office/drawing/2010/main" xmlns="">
                   <a:solidFill>
                     <a:srgbClr val="FFFFFF"/>
                   </a:solidFill>
                 </a14:hiddenFill>
               </a:ext>
               <a:ext uri="{91240B29-F687-4f45-9708-019B960494DF}">
-                <a14:hiddenLine xmlns="" xmlns:a14="http://schemas.microsoft.com/office/drawing/2010/main" w="9525">
+                <a14:hiddenLine xmlns:a14="http://schemas.microsoft.com/office/drawing/2010/main" xmlns="" w="9525">
                   <a:solidFill>
                     <a:srgbClr val="000000"/>
                   </a:solidFill>
@@ -15595,14 +15663,14 @@
             </a:ln>
             <a:extLst>
               <a:ext uri="{909E8E84-426E-40dd-AFC4-6F175D3DCCD1}">
-                <a14:hiddenFill xmlns="" xmlns:a14="http://schemas.microsoft.com/office/drawing/2010/main">
+                <a14:hiddenFill xmlns:a14="http://schemas.microsoft.com/office/drawing/2010/main" xmlns="">
                   <a:solidFill>
                     <a:srgbClr val="FFFFFF"/>
                   </a:solidFill>
                 </a14:hiddenFill>
               </a:ext>
               <a:ext uri="{91240B29-F687-4f45-9708-019B960494DF}">
-                <a14:hiddenLine xmlns="" xmlns:a14="http://schemas.microsoft.com/office/drawing/2010/main" w="9525">
+                <a14:hiddenLine xmlns:a14="http://schemas.microsoft.com/office/drawing/2010/main" xmlns="" w="9525">
                   <a:solidFill>
                     <a:srgbClr val="000000"/>
                   </a:solidFill>
@@ -16061,14 +16129,14 @@
           <a:noFill/>
           <a:extLst>
             <a:ext uri="{909E8E84-426E-40dd-AFC4-6F175D3DCCD1}">
-              <a14:hiddenFill xmlns="" xmlns:a14="http://schemas.microsoft.com/office/drawing/2010/main">
+              <a14:hiddenFill xmlns:a14="http://schemas.microsoft.com/office/drawing/2010/main" xmlns="">
                 <a:solidFill>
                   <a:srgbClr val="FFFFFF"/>
                 </a:solidFill>
               </a14:hiddenFill>
             </a:ext>
             <a:ext uri="{91240B29-F687-4f45-9708-019B960494DF}">
-              <a14:hiddenLine xmlns="" xmlns:a14="http://schemas.microsoft.com/office/drawing/2010/main" w="9525">
+              <a14:hiddenLine xmlns:a14="http://schemas.microsoft.com/office/drawing/2010/main" xmlns="" w="9525">
                 <a:solidFill>
                   <a:srgbClr val="000000"/>
                 </a:solidFill>
@@ -16221,14 +16289,14 @@
           </a:ln>
           <a:extLst>
             <a:ext uri="{909E8E84-426E-40dd-AFC4-6F175D3DCCD1}">
-              <a14:hiddenFill xmlns="" xmlns:a14="http://schemas.microsoft.com/office/drawing/2010/main">
+              <a14:hiddenFill xmlns:a14="http://schemas.microsoft.com/office/drawing/2010/main" xmlns="">
                 <a:solidFill>
                   <a:srgbClr val="FFFFFF"/>
                 </a:solidFill>
               </a14:hiddenFill>
             </a:ext>
             <a:ext uri="{91240B29-F687-4f45-9708-019B960494DF}">
-              <a14:hiddenLine xmlns="" xmlns:a14="http://schemas.microsoft.com/office/drawing/2010/main" w="9525">
+              <a14:hiddenLine xmlns:a14="http://schemas.microsoft.com/office/drawing/2010/main" xmlns="" w="9525">
                 <a:solidFill>
                   <a:srgbClr val="000000"/>
                 </a:solidFill>
@@ -17064,14 +17132,14 @@
           <a:noFill/>
           <a:extLst>
             <a:ext uri="{909E8E84-426E-40dd-AFC4-6F175D3DCCD1}">
-              <a14:hiddenFill xmlns="" xmlns:a14="http://schemas.microsoft.com/office/drawing/2010/main">
+              <a14:hiddenFill xmlns:a14="http://schemas.microsoft.com/office/drawing/2010/main" xmlns="">
                 <a:solidFill>
                   <a:srgbClr val="FFFFFF"/>
                 </a:solidFill>
               </a14:hiddenFill>
             </a:ext>
             <a:ext uri="{91240B29-F687-4f45-9708-019B960494DF}">
-              <a14:hiddenLine xmlns="" xmlns:a14="http://schemas.microsoft.com/office/drawing/2010/main" w="9525">
+              <a14:hiddenLine xmlns:a14="http://schemas.microsoft.com/office/drawing/2010/main" xmlns="" w="9525">
                 <a:solidFill>
                   <a:srgbClr val="000000"/>
                 </a:solidFill>
@@ -17679,14 +17747,14 @@
           <a:noFill/>
           <a:extLst>
             <a:ext uri="{909E8E84-426E-40dd-AFC4-6F175D3DCCD1}">
-              <a14:hiddenFill xmlns="" xmlns:a14="http://schemas.microsoft.com/office/drawing/2010/main">
+              <a14:hiddenFill xmlns:a14="http://schemas.microsoft.com/office/drawing/2010/main" xmlns="">
                 <a:solidFill>
                   <a:srgbClr val="FFFFFF"/>
                 </a:solidFill>
               </a14:hiddenFill>
             </a:ext>
             <a:ext uri="{91240B29-F687-4f45-9708-019B960494DF}">
-              <a14:hiddenLine xmlns="" xmlns:a14="http://schemas.microsoft.com/office/drawing/2010/main" w="9525">
+              <a14:hiddenLine xmlns:a14="http://schemas.microsoft.com/office/drawing/2010/main" xmlns="" w="9525">
                 <a:solidFill>
                   <a:srgbClr val="000000"/>
                 </a:solidFill>
@@ -18313,14 +18381,14 @@
           <a:noFill/>
           <a:extLst>
             <a:ext uri="{909E8E84-426E-40dd-AFC4-6F175D3DCCD1}">
-              <a14:hiddenFill xmlns="" xmlns:a14="http://schemas.microsoft.com/office/drawing/2010/main">
+              <a14:hiddenFill xmlns:a14="http://schemas.microsoft.com/office/drawing/2010/main" xmlns="">
                 <a:solidFill>
                   <a:srgbClr val="FFFFFF"/>
                 </a:solidFill>
               </a14:hiddenFill>
             </a:ext>
             <a:ext uri="{91240B29-F687-4f45-9708-019B960494DF}">
-              <a14:hiddenLine xmlns="" xmlns:a14="http://schemas.microsoft.com/office/drawing/2010/main" w="9525">
+              <a14:hiddenLine xmlns:a14="http://schemas.microsoft.com/office/drawing/2010/main" xmlns="" w="9525">
                 <a:solidFill>
                   <a:srgbClr val="000000"/>
                 </a:solidFill>
@@ -19090,14 +19158,14 @@
           <a:noFill/>
           <a:extLst>
             <a:ext uri="{909E8E84-426E-40dd-AFC4-6F175D3DCCD1}">
-              <a14:hiddenFill xmlns="" xmlns:a14="http://schemas.microsoft.com/office/drawing/2010/main">
+              <a14:hiddenFill xmlns:a14="http://schemas.microsoft.com/office/drawing/2010/main" xmlns="">
                 <a:solidFill>
                   <a:srgbClr val="FFFFFF"/>
                 </a:solidFill>
               </a14:hiddenFill>
             </a:ext>
             <a:ext uri="{91240B29-F687-4f45-9708-019B960494DF}">
-              <a14:hiddenLine xmlns="" xmlns:a14="http://schemas.microsoft.com/office/drawing/2010/main" w="9525">
+              <a14:hiddenLine xmlns:a14="http://schemas.microsoft.com/office/drawing/2010/main" xmlns="" w="9525">
                 <a:solidFill>
                   <a:srgbClr val="000000"/>
                 </a:solidFill>
@@ -19778,14 +19846,14 @@
             </a:ln>
             <a:extLst>
               <a:ext uri="{909E8E84-426E-40dd-AFC4-6F175D3DCCD1}">
-                <a14:hiddenFill xmlns="" xmlns:a14="http://schemas.microsoft.com/office/drawing/2010/main">
+                <a14:hiddenFill xmlns:a14="http://schemas.microsoft.com/office/drawing/2010/main" xmlns="">
                   <a:solidFill>
                     <a:srgbClr val="FFFFFF"/>
                   </a:solidFill>
                 </a14:hiddenFill>
               </a:ext>
               <a:ext uri="{91240B29-F687-4f45-9708-019B960494DF}">
-                <a14:hiddenLine xmlns="" xmlns:a14="http://schemas.microsoft.com/office/drawing/2010/main" w="9525">
+                <a14:hiddenLine xmlns:a14="http://schemas.microsoft.com/office/drawing/2010/main" xmlns="" w="9525">
                   <a:solidFill>
                     <a:srgbClr val="000000"/>
                   </a:solidFill>
@@ -20251,14 +20319,14 @@
           <a:noFill/>
           <a:extLst>
             <a:ext uri="{909E8E84-426E-40dd-AFC4-6F175D3DCCD1}">
-              <a14:hiddenFill xmlns="" xmlns:a14="http://schemas.microsoft.com/office/drawing/2010/main">
+              <a14:hiddenFill xmlns:a14="http://schemas.microsoft.com/office/drawing/2010/main" xmlns="">
                 <a:solidFill>
                   <a:srgbClr val="FFFFFF"/>
                 </a:solidFill>
               </a14:hiddenFill>
             </a:ext>
             <a:ext uri="{91240B29-F687-4f45-9708-019B960494DF}">
-              <a14:hiddenLine xmlns="" xmlns:a14="http://schemas.microsoft.com/office/drawing/2010/main" w="9525">
+              <a14:hiddenLine xmlns:a14="http://schemas.microsoft.com/office/drawing/2010/main" xmlns="" w="9525">
                 <a:solidFill>
                   <a:srgbClr val="000000"/>
                 </a:solidFill>
@@ -20567,7 +20635,7 @@
             </a:ln>
             <a:extLst>
               <a:ext uri="{91240B29-F687-4f45-9708-019B960494DF}">
-                <a14:hiddenLine xmlns="" xmlns:a14="http://schemas.microsoft.com/office/drawing/2010/main" w="9525">
+                <a14:hiddenLine xmlns:a14="http://schemas.microsoft.com/office/drawing/2010/main" xmlns="" w="9525">
                   <a:solidFill>
                     <a:srgbClr val="000000"/>
                   </a:solidFill>
@@ -21211,14 +21279,14 @@
           <a:noFill/>
           <a:extLst>
             <a:ext uri="{909E8E84-426E-40dd-AFC4-6F175D3DCCD1}">
-              <a14:hiddenFill xmlns="" xmlns:a14="http://schemas.microsoft.com/office/drawing/2010/main">
+              <a14:hiddenFill xmlns:a14="http://schemas.microsoft.com/office/drawing/2010/main" xmlns="">
                 <a:solidFill>
                   <a:srgbClr val="FFFFFF"/>
                 </a:solidFill>
               </a14:hiddenFill>
             </a:ext>
             <a:ext uri="{91240B29-F687-4f45-9708-019B960494DF}">
-              <a14:hiddenLine xmlns="" xmlns:a14="http://schemas.microsoft.com/office/drawing/2010/main" w="9525">
+              <a14:hiddenLine xmlns:a14="http://schemas.microsoft.com/office/drawing/2010/main" xmlns="" w="9525">
                 <a:solidFill>
                   <a:srgbClr val="000000"/>
                 </a:solidFill>
@@ -22018,14 +22086,14 @@
           <a:noFill/>
           <a:extLst>
             <a:ext uri="{909E8E84-426E-40dd-AFC4-6F175D3DCCD1}">
-              <a14:hiddenFill xmlns="" xmlns:a14="http://schemas.microsoft.com/office/drawing/2010/main">
+              <a14:hiddenFill xmlns:a14="http://schemas.microsoft.com/office/drawing/2010/main" xmlns="">
                 <a:solidFill>
                   <a:srgbClr val="FFFFFF"/>
                 </a:solidFill>
               </a14:hiddenFill>
             </a:ext>
             <a:ext uri="{91240B29-F687-4f45-9708-019B960494DF}">
-              <a14:hiddenLine xmlns="" xmlns:a14="http://schemas.microsoft.com/office/drawing/2010/main" w="9525">
+              <a14:hiddenLine xmlns:a14="http://schemas.microsoft.com/office/drawing/2010/main" xmlns="" w="9525">
                 <a:solidFill>
                   <a:srgbClr val="000000"/>
                 </a:solidFill>
@@ -22717,14 +22785,14 @@
           <a:noFill/>
           <a:extLst>
             <a:ext uri="{909E8E84-426E-40dd-AFC4-6F175D3DCCD1}">
-              <a14:hiddenFill xmlns="" xmlns:a14="http://schemas.microsoft.com/office/drawing/2010/main">
+              <a14:hiddenFill xmlns:a14="http://schemas.microsoft.com/office/drawing/2010/main" xmlns="">
                 <a:solidFill>
                   <a:srgbClr val="FFFFFF"/>
                 </a:solidFill>
               </a14:hiddenFill>
             </a:ext>
             <a:ext uri="{91240B29-F687-4f45-9708-019B960494DF}">
-              <a14:hiddenLine xmlns="" xmlns:a14="http://schemas.microsoft.com/office/drawing/2010/main" w="9525">
+              <a14:hiddenLine xmlns:a14="http://schemas.microsoft.com/office/drawing/2010/main" xmlns="" w="9525">
                 <a:solidFill>
                   <a:srgbClr val="000000"/>
                 </a:solidFill>
@@ -22917,14 +22985,14 @@
           </a:ln>
           <a:extLst>
             <a:ext uri="{909E8E84-426E-40dd-AFC4-6F175D3DCCD1}">
-              <a14:hiddenFill xmlns="" xmlns:a14="http://schemas.microsoft.com/office/drawing/2010/main">
+              <a14:hiddenFill xmlns:a14="http://schemas.microsoft.com/office/drawing/2010/main" xmlns="">
                 <a:solidFill>
                   <a:srgbClr val="FFFFFF"/>
                 </a:solidFill>
               </a14:hiddenFill>
             </a:ext>
             <a:ext uri="{91240B29-F687-4f45-9708-019B960494DF}">
-              <a14:hiddenLine xmlns="" xmlns:a14="http://schemas.microsoft.com/office/drawing/2010/main" w="9525">
+              <a14:hiddenLine xmlns:a14="http://schemas.microsoft.com/office/drawing/2010/main" xmlns="" w="9525">
                 <a:solidFill>
                   <a:srgbClr val="000000"/>
                 </a:solidFill>
@@ -23098,14 +23166,14 @@
           </a:ln>
           <a:extLst>
             <a:ext uri="{909E8E84-426E-40dd-AFC4-6F175D3DCCD1}">
-              <a14:hiddenFill xmlns="" xmlns:a14="http://schemas.microsoft.com/office/drawing/2010/main">
+              <a14:hiddenFill xmlns:a14="http://schemas.microsoft.com/office/drawing/2010/main" xmlns="">
                 <a:solidFill>
                   <a:srgbClr val="FFFFFF"/>
                 </a:solidFill>
               </a14:hiddenFill>
             </a:ext>
             <a:ext uri="{91240B29-F687-4f45-9708-019B960494DF}">
-              <a14:hiddenLine xmlns="" xmlns:a14="http://schemas.microsoft.com/office/drawing/2010/main" w="9525">
+              <a14:hiddenLine xmlns:a14="http://schemas.microsoft.com/office/drawing/2010/main" xmlns="" w="9525">
                 <a:solidFill>
                   <a:srgbClr val="000000"/>
                 </a:solidFill>
@@ -23452,14 +23520,14 @@
           <a:noFill/>
           <a:extLst>
             <a:ext uri="{909E8E84-426E-40dd-AFC4-6F175D3DCCD1}">
-              <a14:hiddenFill xmlns="" xmlns:a14="http://schemas.microsoft.com/office/drawing/2010/main">
+              <a14:hiddenFill xmlns:a14="http://schemas.microsoft.com/office/drawing/2010/main" xmlns="">
                 <a:solidFill>
                   <a:srgbClr val="FFFFFF"/>
                 </a:solidFill>
               </a14:hiddenFill>
             </a:ext>
             <a:ext uri="{91240B29-F687-4f45-9708-019B960494DF}">
-              <a14:hiddenLine xmlns="" xmlns:a14="http://schemas.microsoft.com/office/drawing/2010/main" w="9525">
+              <a14:hiddenLine xmlns:a14="http://schemas.microsoft.com/office/drawing/2010/main" xmlns="" w="9525">
                 <a:solidFill>
                   <a:srgbClr val="000000"/>
                 </a:solidFill>
@@ -23732,14 +23800,14 @@
           </a:ln>
           <a:extLst>
             <a:ext uri="{909E8E84-426E-40dd-AFC4-6F175D3DCCD1}">
-              <a14:hiddenFill xmlns="" xmlns:a14="http://schemas.microsoft.com/office/drawing/2010/main">
+              <a14:hiddenFill xmlns:a14="http://schemas.microsoft.com/office/drawing/2010/main" xmlns="">
                 <a:solidFill>
                   <a:srgbClr val="FFFFFF"/>
                 </a:solidFill>
               </a14:hiddenFill>
             </a:ext>
             <a:ext uri="{91240B29-F687-4f45-9708-019B960494DF}">
-              <a14:hiddenLine xmlns="" xmlns:a14="http://schemas.microsoft.com/office/drawing/2010/main" w="9525">
+              <a14:hiddenLine xmlns:a14="http://schemas.microsoft.com/office/drawing/2010/main" xmlns="" w="9525">
                 <a:solidFill>
                   <a:srgbClr val="000000"/>
                 </a:solidFill>
@@ -24334,14 +24402,14 @@
           <a:noFill/>
           <a:extLst>
             <a:ext uri="{909E8E84-426E-40dd-AFC4-6F175D3DCCD1}">
-              <a14:hiddenFill xmlns="" xmlns:a14="http://schemas.microsoft.com/office/drawing/2010/main">
+              <a14:hiddenFill xmlns:a14="http://schemas.microsoft.com/office/drawing/2010/main" xmlns="">
                 <a:solidFill>
                   <a:srgbClr val="FFFFFF"/>
                 </a:solidFill>
               </a14:hiddenFill>
             </a:ext>
             <a:ext uri="{91240B29-F687-4f45-9708-019B960494DF}">
-              <a14:hiddenLine xmlns="" xmlns:a14="http://schemas.microsoft.com/office/drawing/2010/main" w="9525">
+              <a14:hiddenLine xmlns:a14="http://schemas.microsoft.com/office/drawing/2010/main" xmlns="" w="9525">
                 <a:solidFill>
                   <a:srgbClr val="000000"/>
                 </a:solidFill>
@@ -24539,14 +24607,14 @@
           </a:ln>
           <a:extLst>
             <a:ext uri="{909E8E84-426E-40dd-AFC4-6F175D3DCCD1}">
-              <a14:hiddenFill xmlns="" xmlns:a14="http://schemas.microsoft.com/office/drawing/2010/main">
+              <a14:hiddenFill xmlns:a14="http://schemas.microsoft.com/office/drawing/2010/main" xmlns="">
                 <a:solidFill>
                   <a:srgbClr val="FFFFFF"/>
                 </a:solidFill>
               </a14:hiddenFill>
             </a:ext>
             <a:ext uri="{91240B29-F687-4f45-9708-019B960494DF}">
-              <a14:hiddenLine xmlns="" xmlns:a14="http://schemas.microsoft.com/office/drawing/2010/main" w="9525">
+              <a14:hiddenLine xmlns:a14="http://schemas.microsoft.com/office/drawing/2010/main" xmlns="" w="9525">
                 <a:solidFill>
                   <a:srgbClr val="000000"/>
                 </a:solidFill>
@@ -25886,14 +25954,14 @@
           <a:noFill/>
           <a:extLst>
             <a:ext uri="{909E8E84-426E-40dd-AFC4-6F175D3DCCD1}">
-              <a14:hiddenFill xmlns="" xmlns:a14="http://schemas.microsoft.com/office/drawing/2010/main">
+              <a14:hiddenFill xmlns:a14="http://schemas.microsoft.com/office/drawing/2010/main" xmlns="">
                 <a:solidFill>
                   <a:srgbClr val="FFFFFF"/>
                 </a:solidFill>
               </a14:hiddenFill>
             </a:ext>
             <a:ext uri="{91240B29-F687-4f45-9708-019B960494DF}">
-              <a14:hiddenLine xmlns="" xmlns:a14="http://schemas.microsoft.com/office/drawing/2010/main" w="9525">
+              <a14:hiddenLine xmlns:a14="http://schemas.microsoft.com/office/drawing/2010/main" xmlns="" w="9525">
                 <a:solidFill>
                   <a:srgbClr val="000000"/>
                 </a:solidFill>
@@ -26046,14 +26114,14 @@
           </a:ln>
           <a:extLst>
             <a:ext uri="{909E8E84-426E-40dd-AFC4-6F175D3DCCD1}">
-              <a14:hiddenFill xmlns="" xmlns:a14="http://schemas.microsoft.com/office/drawing/2010/main">
+              <a14:hiddenFill xmlns:a14="http://schemas.microsoft.com/office/drawing/2010/main" xmlns="">
                 <a:solidFill>
                   <a:srgbClr val="FFFFFF"/>
                 </a:solidFill>
               </a14:hiddenFill>
             </a:ext>
             <a:ext uri="{91240B29-F687-4f45-9708-019B960494DF}">
-              <a14:hiddenLine xmlns="" xmlns:a14="http://schemas.microsoft.com/office/drawing/2010/main" w="9525">
+              <a14:hiddenLine xmlns:a14="http://schemas.microsoft.com/office/drawing/2010/main" xmlns="" w="9525">
                 <a:solidFill>
                   <a:srgbClr val="000000"/>
                 </a:solidFill>
@@ -26687,14 +26755,14 @@
           <a:noFill/>
           <a:extLst>
             <a:ext uri="{909E8E84-426E-40dd-AFC4-6F175D3DCCD1}">
-              <a14:hiddenFill xmlns="" xmlns:a14="http://schemas.microsoft.com/office/drawing/2010/main">
+              <a14:hiddenFill xmlns:a14="http://schemas.microsoft.com/office/drawing/2010/main" xmlns="">
                 <a:solidFill>
                   <a:srgbClr val="FFFFFF"/>
                 </a:solidFill>
               </a14:hiddenFill>
             </a:ext>
             <a:ext uri="{91240B29-F687-4f45-9708-019B960494DF}">
-              <a14:hiddenLine xmlns="" xmlns:a14="http://schemas.microsoft.com/office/drawing/2010/main" w="9525">
+              <a14:hiddenLine xmlns:a14="http://schemas.microsoft.com/office/drawing/2010/main" xmlns="" w="9525">
                 <a:solidFill>
                   <a:srgbClr val="000000"/>
                 </a:solidFill>
@@ -26847,14 +26915,14 @@
           </a:ln>
           <a:extLst>
             <a:ext uri="{909E8E84-426E-40dd-AFC4-6F175D3DCCD1}">
-              <a14:hiddenFill xmlns="" xmlns:a14="http://schemas.microsoft.com/office/drawing/2010/main">
+              <a14:hiddenFill xmlns:a14="http://schemas.microsoft.com/office/drawing/2010/main" xmlns="">
                 <a:solidFill>
                   <a:srgbClr val="FFFFFF"/>
                 </a:solidFill>
               </a14:hiddenFill>
             </a:ext>
             <a:ext uri="{91240B29-F687-4f45-9708-019B960494DF}">
-              <a14:hiddenLine xmlns="" xmlns:a14="http://schemas.microsoft.com/office/drawing/2010/main" w="9525">
+              <a14:hiddenLine xmlns:a14="http://schemas.microsoft.com/office/drawing/2010/main" xmlns="" w="9525">
                 <a:solidFill>
                   <a:srgbClr val="000000"/>
                 </a:solidFill>
@@ -27585,14 +27653,14 @@
           <a:noFill/>
           <a:extLst>
             <a:ext uri="{909E8E84-426E-40dd-AFC4-6F175D3DCCD1}">
-              <a14:hiddenFill xmlns="" xmlns:a14="http://schemas.microsoft.com/office/drawing/2010/main">
+              <a14:hiddenFill xmlns:a14="http://schemas.microsoft.com/office/drawing/2010/main" xmlns="">
                 <a:solidFill>
                   <a:srgbClr val="FFFFFF"/>
                 </a:solidFill>
               </a14:hiddenFill>
             </a:ext>
             <a:ext uri="{91240B29-F687-4f45-9708-019B960494DF}">
-              <a14:hiddenLine xmlns="" xmlns:a14="http://schemas.microsoft.com/office/drawing/2010/main" w="9525">
+              <a14:hiddenLine xmlns:a14="http://schemas.microsoft.com/office/drawing/2010/main" xmlns="" w="9525">
                 <a:solidFill>
                   <a:srgbClr val="000000"/>
                 </a:solidFill>
@@ -28457,14 +28525,14 @@
           <a:noFill/>
           <a:extLst>
             <a:ext uri="{909E8E84-426E-40dd-AFC4-6F175D3DCCD1}">
-              <a14:hiddenFill xmlns="" xmlns:a14="http://schemas.microsoft.com/office/drawing/2010/main">
+              <a14:hiddenFill xmlns:a14="http://schemas.microsoft.com/office/drawing/2010/main" xmlns="">
                 <a:solidFill>
                   <a:srgbClr val="FFFFFF"/>
                 </a:solidFill>
               </a14:hiddenFill>
             </a:ext>
             <a:ext uri="{91240B29-F687-4f45-9708-019B960494DF}">
-              <a14:hiddenLine xmlns="" xmlns:a14="http://schemas.microsoft.com/office/drawing/2010/main" w="9525">
+              <a14:hiddenLine xmlns:a14="http://schemas.microsoft.com/office/drawing/2010/main" xmlns="" w="9525">
                 <a:solidFill>
                   <a:srgbClr val="000000"/>
                 </a:solidFill>
@@ -29629,14 +29697,14 @@
           <a:noFill/>
           <a:extLst>
             <a:ext uri="{909E8E84-426E-40dd-AFC4-6F175D3DCCD1}">
-              <a14:hiddenFill xmlns="" xmlns:a14="http://schemas.microsoft.com/office/drawing/2010/main">
+              <a14:hiddenFill xmlns:a14="http://schemas.microsoft.com/office/drawing/2010/main" xmlns="">
                 <a:solidFill>
                   <a:srgbClr val="FFFFFF"/>
                 </a:solidFill>
               </a14:hiddenFill>
             </a:ext>
             <a:ext uri="{91240B29-F687-4f45-9708-019B960494DF}">
-              <a14:hiddenLine xmlns="" xmlns:a14="http://schemas.microsoft.com/office/drawing/2010/main" w="9525">
+              <a14:hiddenLine xmlns:a14="http://schemas.microsoft.com/office/drawing/2010/main" xmlns="" w="9525">
                 <a:solidFill>
                   <a:srgbClr val="000000"/>
                 </a:solidFill>
@@ -30645,14 +30713,14 @@
           <a:noFill/>
           <a:extLst>
             <a:ext uri="{909E8E84-426E-40dd-AFC4-6F175D3DCCD1}">
-              <a14:hiddenFill xmlns="" xmlns:a14="http://schemas.microsoft.com/office/drawing/2010/main">
+              <a14:hiddenFill xmlns:a14="http://schemas.microsoft.com/office/drawing/2010/main" xmlns="">
                 <a:solidFill>
                   <a:srgbClr val="FFFFFF"/>
                 </a:solidFill>
               </a14:hiddenFill>
             </a:ext>
             <a:ext uri="{91240B29-F687-4f45-9708-019B960494DF}">
-              <a14:hiddenLine xmlns="" xmlns:a14="http://schemas.microsoft.com/office/drawing/2010/main" w="9525">
+              <a14:hiddenLine xmlns:a14="http://schemas.microsoft.com/office/drawing/2010/main" xmlns="" w="9525">
                 <a:solidFill>
                   <a:srgbClr val="000000"/>
                 </a:solidFill>
@@ -31476,14 +31544,14 @@
           <a:noFill/>
           <a:extLst>
             <a:ext uri="{909E8E84-426E-40dd-AFC4-6F175D3DCCD1}">
-              <a14:hiddenFill xmlns="" xmlns:a14="http://schemas.microsoft.com/office/drawing/2010/main">
+              <a14:hiddenFill xmlns:a14="http://schemas.microsoft.com/office/drawing/2010/main" xmlns="">
                 <a:solidFill>
                   <a:srgbClr val="FFFFFF"/>
                 </a:solidFill>
               </a14:hiddenFill>
             </a:ext>
             <a:ext uri="{91240B29-F687-4f45-9708-019B960494DF}">
-              <a14:hiddenLine xmlns="" xmlns:a14="http://schemas.microsoft.com/office/drawing/2010/main" w="9525">
+              <a14:hiddenLine xmlns:a14="http://schemas.microsoft.com/office/drawing/2010/main" xmlns="" w="9525">
                 <a:solidFill>
                   <a:srgbClr val="000000"/>
                 </a:solidFill>
@@ -32138,14 +32206,14 @@
           <a:noFill/>
           <a:extLst>
             <a:ext uri="{909E8E84-426E-40dd-AFC4-6F175D3DCCD1}">
-              <a14:hiddenFill xmlns="" xmlns:a14="http://schemas.microsoft.com/office/drawing/2010/main">
+              <a14:hiddenFill xmlns:a14="http://schemas.microsoft.com/office/drawing/2010/main" xmlns="">
                 <a:solidFill>
                   <a:srgbClr val="FFFFFF"/>
                 </a:solidFill>
               </a14:hiddenFill>
             </a:ext>
             <a:ext uri="{91240B29-F687-4f45-9708-019B960494DF}">
-              <a14:hiddenLine xmlns="" xmlns:a14="http://schemas.microsoft.com/office/drawing/2010/main" w="9525">
+              <a14:hiddenLine xmlns:a14="http://schemas.microsoft.com/office/drawing/2010/main" xmlns="" w="9525">
                 <a:solidFill>
                   <a:srgbClr val="000000"/>
                 </a:solidFill>
@@ -32819,14 +32887,14 @@
           <a:noFill/>
           <a:extLst>
             <a:ext uri="{909E8E84-426E-40dd-AFC4-6F175D3DCCD1}">
-              <a14:hiddenFill xmlns="" xmlns:a14="http://schemas.microsoft.com/office/drawing/2010/main">
+              <a14:hiddenFill xmlns:a14="http://schemas.microsoft.com/office/drawing/2010/main" xmlns="">
                 <a:solidFill>
                   <a:srgbClr val="FFFFFF"/>
                 </a:solidFill>
               </a14:hiddenFill>
             </a:ext>
             <a:ext uri="{91240B29-F687-4f45-9708-019B960494DF}">
-              <a14:hiddenLine xmlns="" xmlns:a14="http://schemas.microsoft.com/office/drawing/2010/main" w="9525">
+              <a14:hiddenLine xmlns:a14="http://schemas.microsoft.com/office/drawing/2010/main" xmlns="" w="9525">
                 <a:solidFill>
                   <a:srgbClr val="000000"/>
                 </a:solidFill>
@@ -36204,14 +36272,14 @@
           <a:noFill/>
           <a:extLst>
             <a:ext uri="{909E8E84-426E-40dd-AFC4-6F175D3DCCD1}">
-              <a14:hiddenFill xmlns="" xmlns:a14="http://schemas.microsoft.com/office/drawing/2010/main">
+              <a14:hiddenFill xmlns:a14="http://schemas.microsoft.com/office/drawing/2010/main" xmlns="">
                 <a:solidFill>
                   <a:srgbClr val="FFFFFF"/>
                 </a:solidFill>
               </a14:hiddenFill>
             </a:ext>
             <a:ext uri="{91240B29-F687-4f45-9708-019B960494DF}">
-              <a14:hiddenLine xmlns="" xmlns:a14="http://schemas.microsoft.com/office/drawing/2010/main" w="9525">
+              <a14:hiddenLine xmlns:a14="http://schemas.microsoft.com/office/drawing/2010/main" xmlns="" w="9525">
                 <a:solidFill>
                   <a:srgbClr val="000000"/>
                 </a:solidFill>
@@ -43607,14 +43675,14 @@
           <a:effectLst/>
           <a:extLst>
             <a:ext uri="{909E8E84-426E-40dd-AFC4-6F175D3DCCD1}">
-              <a14:hiddenFill xmlns:a14="http://schemas.microsoft.com/office/drawing/2010/main" xmlns="">
+              <a14:hiddenFill xmlns="" xmlns:a14="http://schemas.microsoft.com/office/drawing/2010/main">
                 <a:solidFill>
                   <a:schemeClr val="accent1"/>
                 </a:solidFill>
               </a14:hiddenFill>
             </a:ext>
             <a:ext uri="{AF507438-7753-43e0-B8FC-AC1667EBCBE1}">
-              <a14:hiddenEffects xmlns:a14="http://schemas.microsoft.com/office/drawing/2010/main" xmlns="">
+              <a14:hiddenEffects xmlns="" xmlns:a14="http://schemas.microsoft.com/office/drawing/2010/main">
                 <a:effectLst>
                   <a:outerShdw blurRad="63500" dist="35921" dir="2700000" algn="ctr" rotWithShape="0">
                     <a:schemeClr val="bg2"/>
@@ -44404,14 +44472,14 @@
           <a:noFill/>
           <a:extLst>
             <a:ext uri="{909E8E84-426E-40dd-AFC4-6F175D3DCCD1}">
-              <a14:hiddenFill xmlns="" xmlns:a14="http://schemas.microsoft.com/office/drawing/2010/main">
+              <a14:hiddenFill xmlns:a14="http://schemas.microsoft.com/office/drawing/2010/main" xmlns="">
                 <a:solidFill>
                   <a:srgbClr val="FFFFFF"/>
                 </a:solidFill>
               </a14:hiddenFill>
             </a:ext>
             <a:ext uri="{91240B29-F687-4f45-9708-019B960494DF}">
-              <a14:hiddenLine xmlns="" xmlns:a14="http://schemas.microsoft.com/office/drawing/2010/main" w="9525">
+              <a14:hiddenLine xmlns:a14="http://schemas.microsoft.com/office/drawing/2010/main" xmlns="" w="9525">
                 <a:solidFill>
                   <a:srgbClr val="000000"/>
                 </a:solidFill>
@@ -45612,14 +45680,14 @@
           <a:noFill/>
           <a:extLst>
             <a:ext uri="{909E8E84-426E-40dd-AFC4-6F175D3DCCD1}">
-              <a14:hiddenFill xmlns="" xmlns:a14="http://schemas.microsoft.com/office/drawing/2010/main">
+              <a14:hiddenFill xmlns:a14="http://schemas.microsoft.com/office/drawing/2010/main" xmlns="">
                 <a:solidFill>
                   <a:srgbClr val="FFFFFF"/>
                 </a:solidFill>
               </a14:hiddenFill>
             </a:ext>
             <a:ext uri="{91240B29-F687-4f45-9708-019B960494DF}">
-              <a14:hiddenLine xmlns="" xmlns:a14="http://schemas.microsoft.com/office/drawing/2010/main" w="9525">
+              <a14:hiddenLine xmlns:a14="http://schemas.microsoft.com/office/drawing/2010/main" xmlns="" w="9525">
                 <a:solidFill>
                   <a:srgbClr val="000000"/>
                 </a:solidFill>
@@ -46246,14 +46314,14 @@
           <a:noFill/>
           <a:extLst>
             <a:ext uri="{909E8E84-426E-40dd-AFC4-6F175D3DCCD1}">
-              <a14:hiddenFill xmlns="" xmlns:a14="http://schemas.microsoft.com/office/drawing/2010/main">
+              <a14:hiddenFill xmlns:a14="http://schemas.microsoft.com/office/drawing/2010/main" xmlns="">
                 <a:solidFill>
                   <a:srgbClr val="FFFFFF"/>
                 </a:solidFill>
               </a14:hiddenFill>
             </a:ext>
             <a:ext uri="{91240B29-F687-4f45-9708-019B960494DF}">
-              <a14:hiddenLine xmlns="" xmlns:a14="http://schemas.microsoft.com/office/drawing/2010/main" w="9525">
+              <a14:hiddenLine xmlns:a14="http://schemas.microsoft.com/office/drawing/2010/main" xmlns="" w="9525">
                 <a:solidFill>
                   <a:srgbClr val="000000"/>
                 </a:solidFill>
@@ -46446,14 +46514,14 @@
           </a:ln>
           <a:extLst>
             <a:ext uri="{909E8E84-426E-40dd-AFC4-6F175D3DCCD1}">
-              <a14:hiddenFill xmlns="" xmlns:a14="http://schemas.microsoft.com/office/drawing/2010/main">
+              <a14:hiddenFill xmlns:a14="http://schemas.microsoft.com/office/drawing/2010/main" xmlns="">
                 <a:solidFill>
                   <a:srgbClr val="FFFFFF"/>
                 </a:solidFill>
               </a14:hiddenFill>
             </a:ext>
             <a:ext uri="{91240B29-F687-4f45-9708-019B960494DF}">
-              <a14:hiddenLine xmlns="" xmlns:a14="http://schemas.microsoft.com/office/drawing/2010/main" w="9525">
+              <a14:hiddenLine xmlns:a14="http://schemas.microsoft.com/office/drawing/2010/main" xmlns="" w="9525">
                 <a:solidFill>
                   <a:srgbClr val="000000"/>
                 </a:solidFill>
@@ -46992,14 +47060,14 @@
           <a:noFill/>
           <a:extLst>
             <a:ext uri="{909E8E84-426E-40dd-AFC4-6F175D3DCCD1}">
-              <a14:hiddenFill xmlns="" xmlns:a14="http://schemas.microsoft.com/office/drawing/2010/main">
+              <a14:hiddenFill xmlns:a14="http://schemas.microsoft.com/office/drawing/2010/main" xmlns="">
                 <a:solidFill>
                   <a:srgbClr val="FFFFFF"/>
                 </a:solidFill>
               </a14:hiddenFill>
             </a:ext>
             <a:ext uri="{91240B29-F687-4f45-9708-019B960494DF}">
-              <a14:hiddenLine xmlns="" xmlns:a14="http://schemas.microsoft.com/office/drawing/2010/main" w="9525">
+              <a14:hiddenLine xmlns:a14="http://schemas.microsoft.com/office/drawing/2010/main" xmlns="" w="9525">
                 <a:solidFill>
                   <a:srgbClr val="000000"/>
                 </a:solidFill>
@@ -47857,14 +47925,14 @@
           <a:noFill/>
           <a:extLst>
             <a:ext uri="{909E8E84-426E-40dd-AFC4-6F175D3DCCD1}">
-              <a14:hiddenFill xmlns="" xmlns:a14="http://schemas.microsoft.com/office/drawing/2010/main">
+              <a14:hiddenFill xmlns:a14="http://schemas.microsoft.com/office/drawing/2010/main" xmlns="">
                 <a:solidFill>
                   <a:srgbClr val="FFFFFF"/>
                 </a:solidFill>
               </a14:hiddenFill>
             </a:ext>
             <a:ext uri="{91240B29-F687-4f45-9708-019B960494DF}">
-              <a14:hiddenLine xmlns="" xmlns:a14="http://schemas.microsoft.com/office/drawing/2010/main" w="9525">
+              <a14:hiddenLine xmlns:a14="http://schemas.microsoft.com/office/drawing/2010/main" xmlns="" w="9525">
                 <a:solidFill>
                   <a:srgbClr val="000000"/>
                 </a:solidFill>

--- a/topic10-declaring-types-and-classes/unit-10a-lectures/talk-1/a-type-decl.pptx
+++ b/topic10-declaring-types-and-classes/unit-10a-lectures/talk-1/a-type-decl.pptx
@@ -9209,8 +9209,8 @@
         </p:nvSpPr>
         <p:spPr bwMode="auto">
           <a:xfrm>
-            <a:off x="1700214" y="5164138"/>
-            <a:ext cx="8791575" cy="609600"/>
+            <a:off x="1700214" y="5164137"/>
+            <a:ext cx="8791575" cy="1024627"/>
           </a:xfrm>
           <a:prstGeom prst="rect">
             <a:avLst/>
